--- a/docs/02_営業・商談資料/積立金入力アシスタント_説明スライド.pptx
+++ b/docs/02_営業・商談資料/積立金入力アシスタント_説明スライド.pptx
@@ -3885,7 +3885,7 @@
                 </a:solidFill>
                 <a:latin typeface="游ゴシック"/>
               </a:rPr>
-              <a:t>料金プラン（初期費用0円・30日間無料トライアル）</a:t>
+              <a:t>ご利用料金について（仮）</a:t>
             </a:r>
           </a:p>
         </p:txBody>
@@ -3941,18 +3941,18 @@
         </p:nvSpPr>
         <p:spPr>
           <a:xfrm>
-            <a:off x="576000" y="1440000"/>
-            <a:ext cx="3528000" cy="4140000"/>
+            <a:off x="2160000" y="1655999"/>
+            <a:ext cx="7848000" cy="2232000"/>
           </a:xfrm>
           <a:prstGeom prst="roundRect">
             <a:avLst/>
           </a:prstGeom>
           <a:solidFill>
-            <a:srgbClr val="FFFFFF"/>
+            <a:srgbClr val="FFF7E0"/>
           </a:solidFill>
-          <a:ln w="19050">
+          <a:ln w="38100">
             <a:solidFill>
-              <a:srgbClr val="D5DEED"/>
+              <a:srgbClr val="F5B731"/>
             </a:solidFill>
           </a:ln>
         </p:spPr>
@@ -3976,267 +3976,39 @@
           <a:p>
             <a:pPr algn="ctr"/>
             <a:r>
-              <a:rPr b="1" sz="2000">
+              <a:rPr b="1" sz="4400">
                 <a:solidFill>
                   <a:srgbClr val="1B2F56"/>
                 </a:solidFill>
                 <a:latin typeface="游ゴシック"/>
               </a:rPr>
-              <a:t>ライト</a:t>
+              <a:t>要相談</a:t>
             </a:r>
           </a:p>
           <a:p>
             <a:pPr algn="ctr"/>
             <a:r>
-              <a:rPr b="1" sz="2800">
-                <a:solidFill>
-                  <a:srgbClr val="2F5FA8"/>
+              <a:rPr b="1" sz="1800">
+                <a:solidFill>
+                  <a:srgbClr val="1B2F56"/>
                 </a:solidFill>
                 <a:latin typeface="游ゴシック"/>
               </a:rPr>
-              <a:t>9,800円/月</a:t>
-            </a:r>
-          </a:p>
-          <a:p>
-            <a:pPr algn="l"/>
-            <a:r>
-              <a:rPr b="0" sz="1400">
-                <a:solidFill>
-                  <a:srgbClr val="1B2F56"/>
-                </a:solidFill>
-                <a:latin typeface="游ゴシック"/>
-              </a:rPr>
-              <a:t>・1学年（1会計）</a:t>
-            </a:r>
-          </a:p>
-          <a:p>
-            <a:pPr algn="l"/>
-            <a:r>
-              <a:rPr b="0" sz="1400">
-                <a:solidFill>
-                  <a:srgbClr val="1B2F56"/>
-                </a:solidFill>
-                <a:latin typeface="游ゴシック"/>
-              </a:rPr>
-              <a:t>・メールサポート</a:t>
-            </a:r>
-          </a:p>
-        </p:txBody>
-      </p:sp>
-      <p:sp>
-        <p:nvSpPr>
-          <p:cNvPr id="5" name="Rounded Rectangle 4"/>
-          <p:cNvSpPr/>
-          <p:nvPr/>
-        </p:nvSpPr>
-        <p:spPr>
-          <a:xfrm>
-            <a:off x="4392000" y="1440000"/>
-            <a:ext cx="3528000" cy="4140000"/>
-          </a:xfrm>
-          <a:prstGeom prst="roundRect">
-            <a:avLst/>
-          </a:prstGeom>
-          <a:solidFill>
-            <a:srgbClr val="FFF7E0"/>
-          </a:solidFill>
-          <a:ln w="38100">
-            <a:solidFill>
-              <a:srgbClr val="F5B731"/>
-            </a:solidFill>
-          </a:ln>
-        </p:spPr>
-        <p:style>
-          <a:lnRef idx="1">
-            <a:schemeClr val="accent1"/>
-          </a:lnRef>
-          <a:fillRef idx="3">
-            <a:schemeClr val="accent1"/>
-          </a:fillRef>
-          <a:effectRef idx="2">
-            <a:schemeClr val="accent1"/>
-          </a:effectRef>
-          <a:fontRef idx="minor">
-            <a:schemeClr val="lt1"/>
-          </a:fontRef>
-        </p:style>
-        <p:txBody>
-          <a:bodyPr rtlCol="0" anchor="ctr" wrap="square"/>
-          <a:lstStyle/>
-          <a:p>
-            <a:pPr algn="ctr"/>
-            <a:r>
-              <a:rPr b="1" sz="2000">
-                <a:solidFill>
-                  <a:srgbClr val="1B2F56"/>
-                </a:solidFill>
-                <a:latin typeface="游ゴシック"/>
-              </a:rPr>
-              <a:t>スタンダード（おすすめ）</a:t>
-            </a:r>
-          </a:p>
-          <a:p>
-            <a:pPr algn="ctr"/>
-            <a:r>
-              <a:rPr b="1" sz="2800">
-                <a:solidFill>
-                  <a:srgbClr val="2F5FA8"/>
-                </a:solidFill>
-                <a:latin typeface="游ゴシック"/>
-              </a:rPr>
-              <a:t>19,800円/月</a:t>
-            </a:r>
-          </a:p>
-          <a:p>
-            <a:pPr algn="l"/>
-            <a:r>
-              <a:rPr b="0" sz="1400">
-                <a:solidFill>
-                  <a:srgbClr val="1B2F56"/>
-                </a:solidFill>
-                <a:latin typeface="游ゴシック"/>
-              </a:rPr>
-              <a:t>・全学年（3会計）</a:t>
-            </a:r>
-          </a:p>
-          <a:p>
-            <a:pPr algn="l"/>
-            <a:r>
-              <a:rPr b="0" sz="1400">
-                <a:solidFill>
-                  <a:srgbClr val="1B2F56"/>
-                </a:solidFill>
-                <a:latin typeface="游ゴシック"/>
-              </a:rPr>
-              <a:t>・新年度対応アップデート</a:t>
-            </a:r>
-          </a:p>
-          <a:p>
-            <a:pPr algn="l"/>
-            <a:r>
-              <a:rPr b="0" sz="1400">
-                <a:solidFill>
-                  <a:srgbClr val="1B2F56"/>
-                </a:solidFill>
-                <a:latin typeface="游ゴシック"/>
-              </a:rPr>
-              <a:t>・導入支援・優先サポート</a:t>
-            </a:r>
-          </a:p>
-        </p:txBody>
-      </p:sp>
-      <p:sp>
-        <p:nvSpPr>
-          <p:cNvPr id="6" name="Rounded Rectangle 5"/>
-          <p:cNvSpPr/>
-          <p:nvPr/>
-        </p:nvSpPr>
-        <p:spPr>
-          <a:xfrm>
-            <a:off x="8208000" y="1440000"/>
-            <a:ext cx="3528000" cy="4140000"/>
-          </a:xfrm>
-          <a:prstGeom prst="roundRect">
-            <a:avLst/>
-          </a:prstGeom>
-          <a:solidFill>
-            <a:srgbClr val="FFFFFF"/>
-          </a:solidFill>
-          <a:ln w="19050">
-            <a:solidFill>
-              <a:srgbClr val="D5DEED"/>
-            </a:solidFill>
-          </a:ln>
-        </p:spPr>
-        <p:style>
-          <a:lnRef idx="1">
-            <a:schemeClr val="accent1"/>
-          </a:lnRef>
-          <a:fillRef idx="3">
-            <a:schemeClr val="accent1"/>
-          </a:fillRef>
-          <a:effectRef idx="2">
-            <a:schemeClr val="accent1"/>
-          </a:effectRef>
-          <a:fontRef idx="minor">
-            <a:schemeClr val="lt1"/>
-          </a:fontRef>
-        </p:style>
-        <p:txBody>
-          <a:bodyPr rtlCol="0" anchor="ctr" wrap="square"/>
-          <a:lstStyle/>
-          <a:p>
-            <a:pPr algn="ctr"/>
-            <a:r>
-              <a:rPr b="1" sz="2000">
-                <a:solidFill>
-                  <a:srgbClr val="1B2F56"/>
-                </a:solidFill>
-                <a:latin typeface="游ゴシック"/>
-              </a:rPr>
-              <a:t>プレミアム</a:t>
-            </a:r>
-          </a:p>
-          <a:p>
-            <a:pPr algn="ctr"/>
-            <a:r>
-              <a:rPr b="1" sz="2800">
-                <a:solidFill>
-                  <a:srgbClr val="2F5FA8"/>
-                </a:solidFill>
-                <a:latin typeface="游ゴシック"/>
-              </a:rPr>
-              <a:t>34,800円/月</a:t>
-            </a:r>
-          </a:p>
-          <a:p>
-            <a:pPr algn="l"/>
-            <a:r>
-              <a:rPr b="0" sz="1400">
-                <a:solidFill>
-                  <a:srgbClr val="1B2F56"/>
-                </a:solidFill>
-                <a:latin typeface="游ゴシック"/>
-              </a:rPr>
-              <a:t>・全学年＋様式カスタマイズ</a:t>
-            </a:r>
-          </a:p>
-          <a:p>
-            <a:pPr algn="l"/>
-            <a:r>
-              <a:rPr b="0" sz="1400">
-                <a:solidFill>
-                  <a:srgbClr val="1B2F56"/>
-                </a:solidFill>
-                <a:latin typeface="游ゴシック"/>
-              </a:rPr>
-              <a:t>・研修年2回・電話サポート</a:t>
-            </a:r>
-          </a:p>
-          <a:p>
-            <a:pPr algn="l"/>
-            <a:r>
-              <a:rPr b="0" sz="1400">
-                <a:solidFill>
-                  <a:srgbClr val="1B2F56"/>
-                </a:solidFill>
-                <a:latin typeface="游ゴシック"/>
-              </a:rPr>
-              <a:t>・データ移行支援</a:t>
-            </a:r>
-          </a:p>
-        </p:txBody>
-      </p:sp>
-      <p:sp>
-        <p:nvSpPr>
-          <p:cNvPr id="7" name="TextBox 6"/>
+              <a:t>学校のご予算に合わせて個別にお見積りします</a:t>
+            </a:r>
+          </a:p>
+        </p:txBody>
+      </p:sp>
+      <p:sp>
+        <p:nvSpPr>
+          <p:cNvPr id="5" name="TextBox 4"/>
           <p:cNvSpPr txBox="1"/>
           <p:nvPr/>
         </p:nvSpPr>
         <p:spPr>
           <a:xfrm>
-            <a:off x="576000" y="5760000"/>
-            <a:ext cx="10980000" cy="576000"/>
+            <a:off x="1440000" y="4176000"/>
+            <a:ext cx="9360000" cy="1800000"/>
           </a:xfrm>
           <a:prstGeom prst="rect">
             <a:avLst/>
@@ -4244,20 +4016,41 @@
           <a:noFill/>
         </p:spPr>
         <p:txBody>
-          <a:bodyPr wrap="none">
+          <a:bodyPr wrap="square">
             <a:spAutoFit/>
           </a:bodyPr>
           <a:lstStyle/>
           <a:p>
-            <a:pPr algn="ctr"/>
-            <a:r>
-              <a:rPr sz="1400" b="0">
+            <a:r>
+              <a:rPr sz="1600">
                 <a:solidFill>
                   <a:srgbClr val="66707D"/>
                 </a:solidFill>
                 <a:latin typeface="游ゴシック"/>
               </a:rPr>
-              <a:t>年間契約・税別／年払いは2ヶ月分割引／請求書払い対応。生徒1人あたり月約62円（320名校・スタンダード）</a:t>
+              <a:t>・初期費用は0円。30日間の無料トライアルからノーリスクで始められます</a:t>
+            </a:r>
+          </a:p>
+          <a:p>
+            <a:r>
+              <a:rPr sz="1600">
+                <a:solidFill>
+                  <a:srgbClr val="66707D"/>
+                </a:solidFill>
+                <a:latin typeface="游ゴシック"/>
+              </a:rPr>
+              <a:t>・お見積り・ご相談は無料です（金額のお話はトライアルで価値をご確認いただいた後で結構です）</a:t>
+            </a:r>
+          </a:p>
+          <a:p>
+            <a:r>
+              <a:rPr sz="1600">
+                <a:solidFill>
+                  <a:srgbClr val="66707D"/>
+                </a:solidFill>
+                <a:latin typeface="游ゴシック"/>
+              </a:rPr>
+              <a:t>・年額・月額どちらでも、請求書払いに対応します</a:t>
             </a:r>
           </a:p>
         </p:txBody>
@@ -4389,41 +4182,6 @@
                 <a:latin typeface="游ゴシック"/>
               </a:rPr>
               <a:t>初期費用0円・30日間無料トライアル｜まずは架空データの練習環境からノーリスクで</a:t>
-            </a:r>
-          </a:p>
-        </p:txBody>
-      </p:sp>
-      <p:sp>
-        <p:nvSpPr>
-          <p:cNvPr id="5" name="TextBox 4"/>
-          <p:cNvSpPr txBox="1"/>
-          <p:nvPr/>
-        </p:nvSpPr>
-        <p:spPr>
-          <a:xfrm>
-            <a:off x="720000" y="4680000"/>
-            <a:ext cx="10800000" cy="540000"/>
-          </a:xfrm>
-          <a:prstGeom prst="rect">
-            <a:avLst/>
-          </a:prstGeom>
-          <a:noFill/>
-        </p:spPr>
-        <p:txBody>
-          <a:bodyPr wrap="none">
-            <a:spAutoFit/>
-          </a:bodyPr>
-          <a:lstStyle/>
-          <a:p>
-            <a:pPr algn="ctr"/>
-            <a:r>
-              <a:rPr sz="1600" b="0">
-                <a:solidFill>
-                  <a:srgbClr val="FFFFFF"/>
-                </a:solidFill>
-                <a:latin typeface="游ゴシック"/>
-              </a:rPr>
-              <a:t>お問い合わせ: info@cocorolab.co.jp</a:t>
             </a:r>
           </a:p>
         </p:txBody>
